--- a/1.5mil_ample.pptx
+++ b/1.5mil_ample.pptx
@@ -4505,7 +4505,7 @@
                           <a:ea typeface="Calibri" pitchFamily="34" charset="-122"/>
                           <a:cs typeface="Calibri" pitchFamily="34" charset="-120"/>
                         </a:rPr>
-                        <a:t>85%</a:t>
+                        <a:t>82%</a:t>
                       </a:r>
                       <a:endParaRPr lang="en-US" sz="750" dirty="0">
                         <a:latin typeface="Calibri" charset="0"/>
@@ -13314,7 +13314,7 @@
         </p:nvSpPr>
         <p:spPr>
           <a:xfrm>
-            <a:off x="502920" y="2565801"/>
+            <a:off x="502920" y="2563127"/>
             <a:ext cx="8138160" cy="10973"/>
           </a:xfrm>
           <a:prstGeom prst="rect">
@@ -13339,8 +13339,8 @@
         </p:nvSpPr>
         <p:spPr>
           <a:xfrm>
-            <a:off x="539090" y="2565801"/>
-            <a:ext cx="153721" cy="975777"/>
+            <a:off x="539090" y="2563127"/>
+            <a:ext cx="153721" cy="977223"/>
           </a:xfrm>
           <a:prstGeom prst="rect">
             <a:avLst/>
@@ -13364,8 +13364,8 @@
         </p:nvSpPr>
         <p:spPr>
           <a:xfrm>
-            <a:off x="765150" y="2565801"/>
-            <a:ext cx="153721" cy="975777"/>
+            <a:off x="765150" y="2563127"/>
+            <a:ext cx="153721" cy="977223"/>
           </a:xfrm>
           <a:prstGeom prst="rect">
             <a:avLst/>
@@ -13389,8 +13389,8 @@
         </p:nvSpPr>
         <p:spPr>
           <a:xfrm>
-            <a:off x="991210" y="2565801"/>
-            <a:ext cx="153721" cy="975777"/>
+            <a:off x="991210" y="2563127"/>
+            <a:ext cx="153721" cy="977223"/>
           </a:xfrm>
           <a:prstGeom prst="rect">
             <a:avLst/>
@@ -13414,8 +13414,8 @@
         </p:nvSpPr>
         <p:spPr>
           <a:xfrm>
-            <a:off x="1217270" y="2565801"/>
-            <a:ext cx="153721" cy="975777"/>
+            <a:off x="1217270" y="2563127"/>
+            <a:ext cx="153721" cy="977223"/>
           </a:xfrm>
           <a:prstGeom prst="rect">
             <a:avLst/>
@@ -13439,8 +13439,8 @@
         </p:nvSpPr>
         <p:spPr>
           <a:xfrm>
-            <a:off x="1443330" y="2565801"/>
-            <a:ext cx="153721" cy="975777"/>
+            <a:off x="1443330" y="2563127"/>
+            <a:ext cx="153721" cy="977223"/>
           </a:xfrm>
           <a:prstGeom prst="rect">
             <a:avLst/>
@@ -13464,8 +13464,8 @@
         </p:nvSpPr>
         <p:spPr>
           <a:xfrm>
-            <a:off x="1669390" y="2565801"/>
-            <a:ext cx="153721" cy="975777"/>
+            <a:off x="1669390" y="2563127"/>
+            <a:ext cx="153721" cy="977223"/>
           </a:xfrm>
           <a:prstGeom prst="rect">
             <a:avLst/>
@@ -13528,8 +13528,8 @@
         </p:nvSpPr>
         <p:spPr>
           <a:xfrm>
-            <a:off x="1895450" y="2565801"/>
-            <a:ext cx="153721" cy="1384407"/>
+            <a:off x="1895450" y="2563127"/>
+            <a:ext cx="153721" cy="1387081"/>
           </a:xfrm>
           <a:prstGeom prst="rect">
             <a:avLst/>
@@ -13553,8 +13553,8 @@
         </p:nvSpPr>
         <p:spPr>
           <a:xfrm>
-            <a:off x="2121510" y="2565801"/>
-            <a:ext cx="153721" cy="1119746"/>
+            <a:off x="2121510" y="2563127"/>
+            <a:ext cx="153721" cy="1122313"/>
           </a:xfrm>
           <a:prstGeom prst="rect">
             <a:avLst/>
@@ -13578,8 +13578,8 @@
         </p:nvSpPr>
         <p:spPr>
           <a:xfrm>
-            <a:off x="2347570" y="2565801"/>
-            <a:ext cx="153721" cy="817262"/>
+            <a:off x="2347570" y="2563127"/>
+            <a:ext cx="153721" cy="819716"/>
           </a:xfrm>
           <a:prstGeom prst="rect">
             <a:avLst/>
@@ -13603,8 +13603,8 @@
         </p:nvSpPr>
         <p:spPr>
           <a:xfrm>
-            <a:off x="2573630" y="2565801"/>
-            <a:ext cx="153721" cy="590403"/>
+            <a:off x="2573630" y="2563127"/>
+            <a:ext cx="153721" cy="592778"/>
           </a:xfrm>
           <a:prstGeom prst="rect">
             <a:avLst/>
@@ -13628,8 +13628,8 @@
         </p:nvSpPr>
         <p:spPr>
           <a:xfrm>
-            <a:off x="2799690" y="2565801"/>
-            <a:ext cx="153721" cy="363545"/>
+            <a:off x="2799690" y="2563127"/>
+            <a:ext cx="153721" cy="365831"/>
           </a:xfrm>
           <a:prstGeom prst="rect">
             <a:avLst/>
@@ -13653,8 +13653,8 @@
         </p:nvSpPr>
         <p:spPr>
           <a:xfrm>
-            <a:off x="3025750" y="2565801"/>
-            <a:ext cx="153721" cy="136696"/>
+            <a:off x="3025750" y="2563127"/>
+            <a:ext cx="153721" cy="138883"/>
           </a:xfrm>
           <a:prstGeom prst="rect">
             <a:avLst/>
@@ -13717,8 +13717,8 @@
         </p:nvSpPr>
         <p:spPr>
           <a:xfrm>
-            <a:off x="3251810" y="2475639"/>
-            <a:ext cx="153721" cy="90162"/>
+            <a:off x="3251810" y="2475062"/>
+            <a:ext cx="153721" cy="88065"/>
           </a:xfrm>
           <a:prstGeom prst="rect">
             <a:avLst/>
@@ -13742,8 +13742,8 @@
         </p:nvSpPr>
         <p:spPr>
           <a:xfrm>
-            <a:off x="3477870" y="2324396"/>
-            <a:ext cx="153721" cy="241404"/>
+            <a:off x="3477870" y="2323773"/>
+            <a:ext cx="153721" cy="239354"/>
           </a:xfrm>
           <a:prstGeom prst="rect">
             <a:avLst/>
@@ -13767,8 +13767,8 @@
         </p:nvSpPr>
         <p:spPr>
           <a:xfrm>
-            <a:off x="3703930" y="2173154"/>
-            <a:ext cx="153721" cy="392646"/>
+            <a:off x="3703930" y="2172475"/>
+            <a:ext cx="153721" cy="390652"/>
           </a:xfrm>
           <a:prstGeom prst="rect">
             <a:avLst/>
@@ -13792,8 +13792,8 @@
         </p:nvSpPr>
         <p:spPr>
           <a:xfrm>
-            <a:off x="3929990" y="2021922"/>
-            <a:ext cx="153721" cy="543879"/>
+            <a:off x="3929990" y="2021176"/>
+            <a:ext cx="153721" cy="541951"/>
           </a:xfrm>
           <a:prstGeom prst="rect">
             <a:avLst/>
@@ -13817,8 +13817,8 @@
         </p:nvSpPr>
         <p:spPr>
           <a:xfrm>
-            <a:off x="4156050" y="1870680"/>
-            <a:ext cx="153721" cy="695121"/>
+            <a:off x="4156050" y="1869878"/>
+            <a:ext cx="153721" cy="693249"/>
           </a:xfrm>
           <a:prstGeom prst="rect">
             <a:avLst/>
@@ -13842,8 +13842,8 @@
         </p:nvSpPr>
         <p:spPr>
           <a:xfrm>
-            <a:off x="4382110" y="1840889"/>
-            <a:ext cx="153721" cy="724912"/>
+            <a:off x="4382110" y="1840171"/>
+            <a:ext cx="153721" cy="722956"/>
           </a:xfrm>
           <a:prstGeom prst="rect">
             <a:avLst/>
@@ -13906,8 +13906,8 @@
         </p:nvSpPr>
         <p:spPr>
           <a:xfrm>
-            <a:off x="4608170" y="1811097"/>
-            <a:ext cx="153721" cy="754703"/>
+            <a:off x="4608170" y="1810454"/>
+            <a:ext cx="153721" cy="752673"/>
           </a:xfrm>
           <a:prstGeom prst="rect">
             <a:avLst/>
@@ -13931,8 +13931,8 @@
         </p:nvSpPr>
         <p:spPr>
           <a:xfrm>
-            <a:off x="4834230" y="1781306"/>
-            <a:ext cx="153721" cy="784494"/>
+            <a:off x="4834230" y="1780747"/>
+            <a:ext cx="153721" cy="782380"/>
           </a:xfrm>
           <a:prstGeom prst="rect">
             <a:avLst/>
@@ -13956,8 +13956,8 @@
         </p:nvSpPr>
         <p:spPr>
           <a:xfrm>
-            <a:off x="5060290" y="1751515"/>
-            <a:ext cx="153721" cy="814285"/>
+            <a:off x="5060290" y="1751040"/>
+            <a:ext cx="153721" cy="812087"/>
           </a:xfrm>
           <a:prstGeom prst="rect">
             <a:avLst/>
@@ -13981,8 +13981,8 @@
         </p:nvSpPr>
         <p:spPr>
           <a:xfrm>
-            <a:off x="5286350" y="1721724"/>
-            <a:ext cx="153721" cy="844077"/>
+            <a:off x="5286350" y="1721323"/>
+            <a:ext cx="153721" cy="841804"/>
           </a:xfrm>
           <a:prstGeom prst="rect">
             <a:avLst/>
@@ -14006,8 +14006,8 @@
         </p:nvSpPr>
         <p:spPr>
           <a:xfrm>
-            <a:off x="5512410" y="1701866"/>
-            <a:ext cx="153721" cy="863934"/>
+            <a:off x="5512410" y="1701515"/>
+            <a:ext cx="153721" cy="861612"/>
           </a:xfrm>
           <a:prstGeom prst="rect">
             <a:avLst/>
@@ -14031,8 +14031,8 @@
         </p:nvSpPr>
         <p:spPr>
           <a:xfrm>
-            <a:off x="5738470" y="1682009"/>
-            <a:ext cx="153721" cy="883792"/>
+            <a:off x="5738470" y="1681717"/>
+            <a:ext cx="153721" cy="881410"/>
           </a:xfrm>
           <a:prstGeom prst="rect">
             <a:avLst/>
@@ -14095,8 +14095,8 @@
         </p:nvSpPr>
         <p:spPr>
           <a:xfrm>
-            <a:off x="5964530" y="1662142"/>
-            <a:ext cx="153721" cy="903659"/>
+            <a:off x="5964530" y="1661909"/>
+            <a:ext cx="153721" cy="901218"/>
           </a:xfrm>
           <a:prstGeom prst="rect">
             <a:avLst/>
@@ -14120,8 +14120,8 @@
         </p:nvSpPr>
         <p:spPr>
           <a:xfrm>
-            <a:off x="6190590" y="1642284"/>
-            <a:ext cx="153721" cy="923516"/>
+            <a:off x="6190590" y="1642101"/>
+            <a:ext cx="153721" cy="921026"/>
           </a:xfrm>
           <a:prstGeom prst="rect">
             <a:avLst/>
@@ -14145,8 +14145,8 @@
         </p:nvSpPr>
         <p:spPr>
           <a:xfrm>
-            <a:off x="6416650" y="1632350"/>
-            <a:ext cx="153721" cy="933450"/>
+            <a:off x="6416650" y="1632192"/>
+            <a:ext cx="153721" cy="930935"/>
           </a:xfrm>
           <a:prstGeom prst="rect">
             <a:avLst/>
@@ -14170,8 +14170,8 @@
         </p:nvSpPr>
         <p:spPr>
           <a:xfrm>
-            <a:off x="6642710" y="1612493"/>
-            <a:ext cx="153721" cy="953308"/>
+            <a:off x="6642710" y="1612384"/>
+            <a:ext cx="153721" cy="950743"/>
           </a:xfrm>
           <a:prstGeom prst="rect">
             <a:avLst/>
@@ -14195,8 +14195,8 @@
         </p:nvSpPr>
         <p:spPr>
           <a:xfrm>
-            <a:off x="6868770" y="1602559"/>
-            <a:ext cx="153721" cy="963241"/>
+            <a:off x="6868770" y="1602485"/>
+            <a:ext cx="153721" cy="960642"/>
           </a:xfrm>
           <a:prstGeom prst="rect">
             <a:avLst/>
@@ -14220,8 +14220,8 @@
         </p:nvSpPr>
         <p:spPr>
           <a:xfrm>
-            <a:off x="7094830" y="1592635"/>
-            <a:ext cx="153721" cy="973165"/>
+            <a:off x="7094830" y="1592576"/>
+            <a:ext cx="153721" cy="970551"/>
           </a:xfrm>
           <a:prstGeom prst="rect">
             <a:avLst/>
@@ -14284,8 +14284,8 @@
         </p:nvSpPr>
         <p:spPr>
           <a:xfrm>
-            <a:off x="7320890" y="1582702"/>
-            <a:ext cx="153721" cy="983099"/>
+            <a:off x="7320890" y="1582677"/>
+            <a:ext cx="153721" cy="980450"/>
           </a:xfrm>
           <a:prstGeom prst="rect">
             <a:avLst/>
@@ -14310,7 +14310,7 @@
         <p:spPr>
           <a:xfrm>
             <a:off x="7546950" y="1572768"/>
-            <a:ext cx="153721" cy="993033"/>
+            <a:ext cx="153721" cy="990359"/>
           </a:xfrm>
           <a:prstGeom prst="rect">
             <a:avLst/>
@@ -14335,7 +14335,7 @@
         <p:spPr>
           <a:xfrm>
             <a:off x="7773010" y="1572768"/>
-            <a:ext cx="153721" cy="993033"/>
+            <a:ext cx="153721" cy="990359"/>
           </a:xfrm>
           <a:prstGeom prst="rect">
             <a:avLst/>
@@ -14360,7 +14360,7 @@
         <p:spPr>
           <a:xfrm>
             <a:off x="7999070" y="1572768"/>
-            <a:ext cx="153721" cy="993033"/>
+            <a:ext cx="153721" cy="990359"/>
           </a:xfrm>
           <a:prstGeom prst="rect">
             <a:avLst/>
@@ -14385,7 +14385,7 @@
         <p:spPr>
           <a:xfrm>
             <a:off x="8225130" y="1572768"/>
-            <a:ext cx="153721" cy="993033"/>
+            <a:ext cx="153721" cy="990359"/>
           </a:xfrm>
           <a:prstGeom prst="rect">
             <a:avLst/>
@@ -14410,7 +14410,7 @@
         <p:spPr>
           <a:xfrm>
             <a:off x="8451190" y="1572768"/>
-            <a:ext cx="153721" cy="993033"/>
+            <a:ext cx="153721" cy="990359"/>
           </a:xfrm>
           <a:prstGeom prst="rect">
             <a:avLst/>
@@ -14498,7 +14498,7 @@
                 <a:ea typeface="Calibri" pitchFamily="34" charset="-122"/>
                 <a:cs typeface="Calibri" pitchFamily="34" charset="-120"/>
               </a:rPr>
-              <a:t>$100,766 / mo</a:t>
+              <a:t>$100,346 / mo</a:t>
             </a:r>
             <a:endParaRPr lang="en-US" sz="700" dirty="0"/>
           </a:p>
@@ -14537,7 +14537,7 @@
                 <a:ea typeface="Calibri" pitchFamily="34" charset="-122"/>
                 <a:cs typeface="Calibri" pitchFamily="34" charset="-120"/>
               </a:rPr>
-              <a:t>$-140,480 / mo</a:t>
+              <a:t>$-140,543 / mo</a:t>
             </a:r>
             <a:endParaRPr lang="en-US" sz="700" dirty="0"/>
           </a:p>
@@ -14576,7 +14576,7 @@
                 <a:ea typeface="Calibri" pitchFamily="34" charset="-122"/>
                 <a:cs typeface="Calibri" pitchFamily="34" charset="-120"/>
               </a:rPr>
-              <a:t>Cash trough -$772,942 at month 14, against a $958,000 working capital and debt service reserve funded inside use of funds.</a:t>
+              <a:t>Cash trough -$774,223 at month 14, against a $1,146,000 working capital and debt service reserve funded inside use of funds.</a:t>
             </a:r>
             <a:endParaRPr lang="en-US" sz="950" dirty="0"/>
           </a:p>
@@ -15295,7 +15295,7 @@
                           <a:ea typeface="Calibri" pitchFamily="34" charset="-122"/>
                           <a:cs typeface="Calibri" pitchFamily="34" charset="-120"/>
                         </a:rPr>
-                        <a:t>-$114,751</a:t>
+                        <a:t>-$115,171</a:t>
                       </a:r>
                       <a:endParaRPr lang="en-US" sz="800" dirty="0">
                         <a:latin typeface="Calibri" charset="0"/>
@@ -15707,7 +15707,7 @@
                           <a:ea typeface="Calibri" pitchFamily="34" charset="-122"/>
                           <a:cs typeface="Calibri" pitchFamily="34" charset="-120"/>
                         </a:rPr>
-                        <a:t>$383,666</a:t>
+                        <a:t>$383,246</a:t>
                       </a:r>
                       <a:endParaRPr lang="en-US" sz="800" dirty="0">
                         <a:latin typeface="Calibri" charset="0"/>
@@ -17767,7 +17767,7 @@
                           <a:ea typeface="Calibri" pitchFamily="34" charset="-122"/>
                           <a:cs typeface="Calibri" pitchFamily="34" charset="-120"/>
                         </a:rPr>
-                        <a:t>$100,766</a:t>
+                        <a:t>$100,346</a:t>
                       </a:r>
                       <a:endParaRPr lang="en-US" sz="800" dirty="0">
                         <a:latin typeface="Calibri" charset="0"/>
@@ -18418,7 +18418,7 @@
                 <a:ea typeface="Calibri" pitchFamily="34" charset="-122"/>
                 <a:cs typeface="Calibri" pitchFamily="34" charset="-120"/>
               </a:rPr>
-              <a:t>$276,239</a:t>
+              <a:t>$275,937</a:t>
             </a:r>
             <a:endParaRPr lang="en-US" sz="900" dirty="0"/>
           </a:p>
@@ -18496,7 +18496,7 @@
                 <a:ea typeface="Calibri" pitchFamily="34" charset="-122"/>
                 <a:cs typeface="Calibri" pitchFamily="34" charset="-120"/>
               </a:rPr>
-              <a:t>$-6,661</a:t>
+              <a:t>$-6,963</a:t>
             </a:r>
             <a:endParaRPr lang="en-US" sz="900" dirty="0"/>
           </a:p>
@@ -18574,7 +18574,7 @@
                 <a:ea typeface="Calibri" pitchFamily="34" charset="-122"/>
                 <a:cs typeface="Calibri" pitchFamily="34" charset="-120"/>
               </a:rPr>
-              <a:t>-0.13x</a:t>
+              <a:t>-0.14x</a:t>
             </a:r>
             <a:endParaRPr lang="en-US" sz="900" dirty="0"/>
           </a:p>
@@ -18679,7 +18679,7 @@
                 <a:ea typeface="Century Gothic" pitchFamily="34" charset="-122"/>
                 <a:cs typeface="Century Gothic" pitchFamily="34" charset="-120"/>
               </a:rPr>
-              <a:t>$1.21M / yr</a:t>
+              <a:t>$1.20M / yr</a:t>
             </a:r>
             <a:endParaRPr lang="en-US" sz="1800" dirty="0"/>
           </a:p>
@@ -18877,7 +18877,7 @@
                 <a:ea typeface="Calibri" pitchFamily="34" charset="-122"/>
                 <a:cs typeface="Calibri" pitchFamily="34" charset="-120"/>
               </a:rPr>
-              <a:t>$383,666</a:t>
+              <a:t>$383,246</a:t>
             </a:r>
             <a:endParaRPr lang="en-US" sz="900" dirty="0"/>
           </a:p>
@@ -18955,7 +18955,7 @@
                 <a:ea typeface="Calibri" pitchFamily="34" charset="-122"/>
                 <a:cs typeface="Calibri" pitchFamily="34" charset="-120"/>
               </a:rPr>
-              <a:t>$100,766</a:t>
+              <a:t>$100,346</a:t>
             </a:r>
             <a:endParaRPr lang="en-US" sz="900" dirty="0"/>
           </a:p>
@@ -19033,7 +19033,7 @@
                 <a:ea typeface="Calibri" pitchFamily="34" charset="-122"/>
                 <a:cs typeface="Calibri" pitchFamily="34" charset="-120"/>
               </a:rPr>
-              <a:t>2.01x</a:t>
+              <a:t>2.00x</a:t>
             </a:r>
             <a:endParaRPr lang="en-US" sz="900" dirty="0"/>
           </a:p>
@@ -19138,7 +19138,7 @@
                 <a:ea typeface="Century Gothic" pitchFamily="34" charset="-122"/>
                 <a:cs typeface="Century Gothic" pitchFamily="34" charset="-120"/>
               </a:rPr>
-              <a:t>$2.50M / yr</a:t>
+              <a:t>$2.49M / yr</a:t>
             </a:r>
             <a:endParaRPr lang="en-US" sz="1800" dirty="0"/>
           </a:p>
@@ -19336,7 +19336,7 @@
                 <a:ea typeface="Calibri" pitchFamily="34" charset="-122"/>
                 <a:cs typeface="Calibri" pitchFamily="34" charset="-120"/>
               </a:rPr>
-              <a:t>$491,092</a:t>
+              <a:t>$490,554</a:t>
             </a:r>
             <a:endParaRPr lang="en-US" sz="900" dirty="0"/>
           </a:p>
@@ -19414,7 +19414,7 @@
                 <a:ea typeface="Calibri" pitchFamily="34" charset="-122"/>
                 <a:cs typeface="Calibri" pitchFamily="34" charset="-120"/>
               </a:rPr>
-              <a:t>$208,192</a:t>
+              <a:t>$207,654</a:t>
             </a:r>
             <a:endParaRPr lang="en-US" sz="900" dirty="0"/>
           </a:p>
@@ -19492,7 +19492,7 @@
                 <a:ea typeface="Calibri" pitchFamily="34" charset="-122"/>
                 <a:cs typeface="Calibri" pitchFamily="34" charset="-120"/>
               </a:rPr>
-              <a:t>4.15x</a:t>
+              <a:t>4.14x</a:t>
             </a:r>
             <a:endParaRPr lang="en-US" sz="900" dirty="0"/>
           </a:p>
@@ -20139,7 +20139,7 @@
                 <a:ea typeface="Calibri" pitchFamily="34" charset="-122"/>
                 <a:cs typeface="Calibri" pitchFamily="34" charset="-120"/>
               </a:rPr>
-              <a:t>Project cost is unchanged. The private raise replaces the minimum equity injection, so the SBA 7(a) loan shrinks to fill the rest. Less debt against the same operating income is what lifts stabilized coverage to 2.01x.</a:t>
+              <a:t>Project cost is unchanged. The private raise replaces the minimum equity injection, so the SBA 7(a) loan shrinks to fill the rest. Less debt against the same operating income is what lifts stabilized coverage to 2.00x.</a:t>
             </a:r>
             <a:endParaRPr lang="en-US" sz="900" dirty="0"/>
           </a:p>
@@ -20369,7 +20369,7 @@
                 <a:ea typeface="Calibri" pitchFamily="34" charset="-122"/>
                 <a:cs typeface="Calibri" pitchFamily="34" charset="-120"/>
               </a:rPr>
-              <a:t>The working capital and debt service reserve is sized against the modeled cash trough of $772,942 at month 14, not to a round number.</a:t>
+              <a:t>The working capital and debt service reserve is sized against the modeled cash trough of $774,223 at month 14, not to a round number.</a:t>
             </a:r>
             <a:endParaRPr lang="en-US" sz="1150" dirty="0"/>
           </a:p>
@@ -21244,7 +21244,7 @@
                           <a:ea typeface="Calibri" pitchFamily="34" charset="-122"/>
                           <a:cs typeface="Calibri" pitchFamily="34" charset="-120"/>
                         </a:rPr>
-                        <a:t>Recovery technology: HBOT, Ammortal, Aescape</a:t>
+                        <a:t>Recovery technology: HBOT purchased, Ammortal deposit</a:t>
                       </a:r>
                       <a:endParaRPr lang="en-US" sz="850" dirty="0">
                         <a:latin typeface="Calibri" charset="0"/>
@@ -21312,7 +21312,7 @@
                           <a:ea typeface="Calibri" pitchFamily="34" charset="-122"/>
                           <a:cs typeface="Calibri" pitchFamily="34" charset="-120"/>
                         </a:rPr>
-                        <a:t>$370,000</a:t>
+                        <a:t>$182,000</a:t>
                       </a:r>
                       <a:endParaRPr lang="en-US" sz="850" dirty="0">
                         <a:latin typeface="Calibri" charset="0"/>
@@ -21380,7 +21380,7 @@
                           <a:ea typeface="Calibri" pitchFamily="34" charset="-122"/>
                           <a:cs typeface="Calibri" pitchFamily="34" charset="-120"/>
                         </a:rPr>
-                        <a:t>7%</a:t>
+                        <a:t>4%</a:t>
                       </a:r>
                       <a:endParaRPr lang="en-US" sz="850" dirty="0">
                         <a:latin typeface="Calibri" charset="0"/>
@@ -22136,7 +22136,7 @@
                           <a:ea typeface="Calibri" pitchFamily="34" charset="-122"/>
                           <a:cs typeface="Calibri" pitchFamily="34" charset="-120"/>
                         </a:rPr>
-                        <a:t>$958,000</a:t>
+                        <a:t>$1,146,000</a:t>
                       </a:r>
                       <a:endParaRPr lang="en-US" sz="850" dirty="0">
                         <a:latin typeface="Calibri" charset="0"/>
@@ -22204,7 +22204,7 @@
                           <a:ea typeface="Calibri" pitchFamily="34" charset="-122"/>
                           <a:cs typeface="Calibri" pitchFamily="34" charset="-120"/>
                         </a:rPr>
-                        <a:t>19%</a:t>
+                        <a:t>23%</a:t>
                       </a:r>
                       <a:endParaRPr lang="en-US" sz="850" dirty="0">
                         <a:latin typeface="Calibri" charset="0"/>
@@ -24008,7 +24008,7 @@
                           <a:ea typeface="Calibri" pitchFamily="34" charset="-122"/>
                           <a:cs typeface="Calibri" pitchFamily="34" charset="-120"/>
                         </a:rPr>
-                        <a:t>$958,000</a:t>
+                        <a:t>$1,146,000</a:t>
                       </a:r>
                       <a:endParaRPr lang="en-US" sz="950" dirty="0">
                         <a:latin typeface="Calibri" charset="0"/>
@@ -24452,7 +24452,7 @@
                           <a:ea typeface="Calibri" pitchFamily="34" charset="-122"/>
                           <a:cs typeface="Calibri" pitchFamily="34" charset="-120"/>
                         </a:rPr>
-                        <a:t>-$1,041,795</a:t>
+                        <a:t>-$1,042,606</a:t>
                       </a:r>
                       <a:endParaRPr lang="en-US" sz="950" dirty="0">
                         <a:latin typeface="Calibri" charset="0"/>
@@ -24726,7 +24726,7 @@
                           <a:ea typeface="Calibri" pitchFamily="34" charset="-122"/>
                           <a:cs typeface="Calibri" pitchFamily="34" charset="-120"/>
                         </a:rPr>
-                        <a:t>$774,585</a:t>
+                        <a:t>$770,884</a:t>
                       </a:r>
                       <a:endParaRPr lang="en-US" sz="950" dirty="0">
                         <a:latin typeface="Calibri" charset="0"/>
@@ -24862,7 +24862,7 @@
                           <a:ea typeface="Calibri" pitchFamily="34" charset="-122"/>
                           <a:cs typeface="Calibri" pitchFamily="34" charset="-120"/>
                         </a:rPr>
-                        <a:t>1.66x</a:t>
+                        <a:t>1.65x</a:t>
                       </a:r>
                       <a:endParaRPr lang="en-US" sz="950" dirty="0">
                         <a:latin typeface="Calibri" charset="0"/>
@@ -25000,7 +25000,7 @@
                           <a:ea typeface="Calibri" pitchFamily="34" charset="-122"/>
                           <a:cs typeface="Calibri" pitchFamily="34" charset="-120"/>
                         </a:rPr>
-                        <a:t>$1,176,945</a:t>
+                        <a:t>$1,172,038</a:t>
                       </a:r>
                       <a:endParaRPr lang="en-US" sz="950" dirty="0">
                         <a:latin typeface="Calibri" charset="0"/>
@@ -25136,7 +25136,7 @@
                           <a:ea typeface="Calibri" pitchFamily="34" charset="-122"/>
                           <a:cs typeface="Calibri" pitchFamily="34" charset="-120"/>
                         </a:rPr>
-                        <a:t>1.96x</a:t>
+                        <a:t>1.95x</a:t>
                       </a:r>
                       <a:endParaRPr lang="en-US" sz="950" dirty="0">
                         <a:latin typeface="Calibri" charset="0"/>
@@ -25274,7 +25274,7 @@
                           <a:ea typeface="Calibri" pitchFamily="34" charset="-122"/>
                           <a:cs typeface="Calibri" pitchFamily="34" charset="-120"/>
                         </a:rPr>
-                        <a:t>$1,209,186</a:t>
+                        <a:t>$1,204,146</a:t>
                       </a:r>
                       <a:endParaRPr lang="en-US" sz="950" dirty="0">
                         <a:latin typeface="Calibri" charset="0"/>
@@ -25410,7 +25410,7 @@
                           <a:ea typeface="Calibri" pitchFamily="34" charset="-122"/>
                           <a:cs typeface="Calibri" pitchFamily="34" charset="-120"/>
                         </a:rPr>
-                        <a:t>2.01x</a:t>
+                        <a:t>2.00x</a:t>
                       </a:r>
                       <a:endParaRPr lang="en-US" sz="950" dirty="0">
                         <a:latin typeface="Calibri" charset="0"/>
@@ -25499,7 +25499,7 @@
                 <a:ea typeface="Calibri" pitchFamily="34" charset="-122"/>
                 <a:cs typeface="Calibri" pitchFamily="34" charset="-120"/>
               </a:rPr>
-              <a:t>Rate sensitivity: 2.01x at 9.5%   ·   1.94x at 10.5%   ·   1.87x at 11.5%</a:t>
+              <a:t>Rate sensitivity: 2.00x at 9.5%   ·   1.93x at 10.5%   ·   1.86x at 11.5%</a:t>
             </a:r>
             <a:endParaRPr lang="en-US" sz="900" dirty="0"/>
           </a:p>
@@ -25772,7 +25772,7 @@
                 <a:ea typeface="Calibri" pitchFamily="34" charset="-122"/>
                 <a:cs typeface="Calibri" pitchFamily="34" charset="-120"/>
               </a:rPr>
-              <a:t>Year 1 operating income is negative. Six of those months are construction and the rest are the opening ramp. Debt service is interest-only for the first 18 months, and the $958,000 reserve inside use of funds is sized against a modeled cash trough of $772,942 at month 14.</a:t>
+              <a:t>Year 1 operating income is negative. Six of those months are construction and the rest are the opening ramp. Debt service is interest-only for the first 18 months, and the $1,146,000 reserve inside use of funds is sized against a modeled cash trough of $774,223 at month 14.</a:t>
             </a:r>
             <a:endParaRPr lang="en-US" sz="1050" dirty="0"/>
           </a:p>
@@ -25793,7 +25793,7 @@
                 <a:ea typeface="Calibri" pitchFamily="34" charset="-122"/>
                 <a:cs typeface="Calibri" pitchFamily="34" charset="-120"/>
               </a:rPr>
-              <a:t>Year 2 coverage of 1.66x already clears the 1.25x convention, before the business reaches stabilization.</a:t>
+              <a:t>Year 2 coverage of 1.65x already clears the 1.25x convention, before the business reaches stabilization.</a:t>
             </a:r>
             <a:endParaRPr lang="en-US" sz="1050" dirty="0"/>
           </a:p>
@@ -25814,7 +25814,7 @@
                 <a:ea typeface="Calibri" pitchFamily="34" charset="-122"/>
                 <a:cs typeface="Calibri" pitchFamily="34" charset="-120"/>
               </a:rPr>
-              <a:t>Rate sensitivity: stabilized coverage runs 2.01x at 9.5%, 1.94x at 10.5%, 1.87x at 11.5%. Coverage holds above 1.25x even 200 basis points above the assumed rate.</a:t>
+              <a:t>Rate sensitivity: stabilized coverage runs 2.00x at 9.5%, 1.93x at 10.5%, 1.86x at 11.5%. Coverage holds above 1.25x even 200 basis points above the assumed rate.</a:t>
             </a:r>
             <a:endParaRPr lang="en-US" sz="1050" dirty="0"/>
           </a:p>
@@ -30612,7 +30612,7 @@
                 <a:ea typeface="Calibri" pitchFamily="34" charset="-122"/>
                 <a:cs typeface="Calibri" pitchFamily="34" charset="-120"/>
               </a:rPr>
-              <a:t>Ample · $1.5M private case  ·  $5.0M project  ·  5,800 SF  ·  2.01x stabilized coverage</a:t>
+              <a:t>Ample · $1.5M private case  ·  $5.0M project  ·  5,800 SF  ·  2.00x stabilized coverage</a:t>
             </a:r>
             <a:endParaRPr lang="en-US" sz="1150" dirty="0"/>
           </a:p>
